--- a/output/education/2026-03-26_palliative-care-community/palliative-care-community_slides_allstaff.pptx
+++ b/output/education/2026-03-26_palliative-care-community/palliative-care-community_slides_allstaff.pptx
@@ -3144,6 +3144,7 @@
               </a:defRPr>
             </a:pPr>
             <a:r>
+              <a:rPr/>
               <a:t>地域で支える緩和ケア — 私たちにできること</a:t>
             </a:r>
           </a:p>
@@ -3180,6 +3181,7 @@
               </a:defRPr>
             </a:pPr>
             <a:r>
+              <a:rPr/>
               <a:t>対象: 全スタッフ（看護師・介護士・事務職員・リハビリ職等）</a:t>
             </a:r>
           </a:p>
@@ -3216,6 +3218,7 @@
               </a:defRPr>
             </a:pPr>
             <a:r>
+              <a:rPr/>
               <a:t>所要時間: 20分</a:t>
             </a:r>
           </a:p>
@@ -3252,6 +3255,7 @@
               </a:defRPr>
             </a:pPr>
             <a:r>
+              <a:rPr/>
               <a:t>IDモデル: ガニェの9教授事象</a:t>
             </a:r>
           </a:p>
@@ -3265,7 +3269,7 @@
         </p:nvSpPr>
         <p:spPr>
           <a:xfrm>
-            <a:off x="548640" y="1783080"/>
+            <a:off x="548640" y="1801368"/>
             <a:ext cx="7772400" cy="320040"/>
           </a:xfrm>
           <a:prstGeom prst="rect">
@@ -3288,6 +3292,7 @@
               </a:defRPr>
             </a:pPr>
             <a:r>
+              <a:rPr/>
               <a:t>作成日: 2026-03-26</a:t>
             </a:r>
           </a:p>
@@ -3350,6 +3355,7 @@
               </a:defRPr>
             </a:pPr>
             <a:r>
+              <a:rPr/>
               <a:t>スライド9: 具体的な場面で考えてみましょう</a:t>
             </a:r>
           </a:p>
@@ -3386,6 +3392,7 @@
               </a:defRPr>
             </a:pPr>
             <a:r>
+              <a:rPr/>
               <a:t>いつもの「おはようございます、よく眠れましたか？」</a:t>
             </a:r>
           </a:p>
@@ -3422,6 +3429,7 @@
               </a:defRPr>
             </a:pPr>
             <a:r>
+              <a:rPr/>
               <a:t>これだけで立派な緩和ケアのアセスメントです。</a:t>
             </a:r>
           </a:p>
@@ -3458,6 +3466,7 @@
               </a:defRPr>
             </a:pPr>
             <a:r>
+              <a:rPr/>
               <a:t>+ひと言の例：</a:t>
             </a:r>
           </a:p>
@@ -3471,7 +3480,7 @@
         </p:nvSpPr>
         <p:spPr>
           <a:xfrm>
-            <a:off x="548640" y="1783080"/>
+            <a:off x="548640" y="1801368"/>
             <a:ext cx="7772400" cy="914399"/>
           </a:xfrm>
           <a:prstGeom prst="rect">
@@ -3495,6 +3504,7 @@
               <a:buChar char="●"/>
             </a:pPr>
             <a:r>
+              <a:rPr/>
               <a:t>「体のどこか痛いところはありませんか？」</a:t>
             </a:r>
           </a:p>
@@ -3509,6 +3519,7 @@
               <a:buChar char="●"/>
             </a:pPr>
             <a:r>
+              <a:rPr/>
               <a:t>「何か気になっていることはありますか？」</a:t>
             </a:r>
           </a:p>
@@ -3523,6 +3534,7 @@
               <a:buChar char="●"/>
             </a:pPr>
             <a:r>
+              <a:rPr/>
               <a:t>「昨日のお薬は楽になりましたか？」</a:t>
             </a:r>
           </a:p>
@@ -3559,6 +3571,7 @@
               </a:defRPr>
             </a:pPr>
             <a:r>
+              <a:rPr/>
               <a:t>食事量が減ってきた利用者さんに：</a:t>
             </a:r>
           </a:p>
@@ -3596,6 +3609,7 @@
               <a:buChar char="●"/>
             </a:pPr>
             <a:r>
+              <a:rPr/>
               <a:t>❌ 「ちゃんと食べないと元気になれませんよ」</a:t>
             </a:r>
           </a:p>
@@ -3610,6 +3624,7 @@
               <a:buChar char="●"/>
             </a:pPr>
             <a:r>
+              <a:rPr/>
               <a:t>✅ 「食べたいものはありますか？少しでも好きなものを」</a:t>
             </a:r>
           </a:p>
@@ -3646,6 +3661,7 @@
               </a:defRPr>
             </a:pPr>
             <a:r>
+              <a:rPr/>
               <a:t>入浴を嫌がるようになった利用者さん：</a:t>
             </a:r>
           </a:p>
@@ -3683,6 +3699,7 @@
               <a:buChar char="●"/>
             </a:pPr>
             <a:r>
+              <a:rPr/>
               <a:t>痛みで動くのがつらい？</a:t>
             </a:r>
           </a:p>
@@ -3697,6 +3714,7 @@
               <a:buChar char="●"/>
             </a:pPr>
             <a:r>
+              <a:rPr/>
               <a:t>裸になることへの抵抗？</a:t>
             </a:r>
           </a:p>
@@ -3711,6 +3729,7 @@
               <a:buChar char="●"/>
             </a:pPr>
             <a:r>
+              <a:rPr/>
               <a:t>体力が落ちて疲れる？</a:t>
             </a:r>
           </a:p>
@@ -3725,6 +3744,7 @@
               <a:buChar char="●"/>
             </a:pPr>
             <a:r>
+              <a:rPr/>
               <a:t>→ 「嫌がる」の背景を考えること = 緩和ケア的思考</a:t>
             </a:r>
           </a:p>
@@ -3787,6 +3807,7 @@
               </a:defRPr>
             </a:pPr>
             <a:r>
+              <a:rPr/>
               <a:t>スライド10: グループワーク（5分間）</a:t>
             </a:r>
           </a:p>
@@ -3831,7 +3852,9 @@
           <a:bodyPr rtlCol="0" anchor="ctr"/>
           <a:lstStyle/>
           <a:p>
-            <a:pPr algn="ctr"/>
+            <a:pPr algn="ctr">
+              <a:defRPr/>
+            </a:pPr>
           </a:p>
         </p:txBody>
       </p:sp>
@@ -3876,7 +3899,9 @@
           <a:bodyPr rtlCol="0" anchor="ctr"/>
           <a:lstStyle/>
           <a:p>
-            <a:pPr algn="ctr"/>
+            <a:pPr algn="ctr">
+              <a:defRPr/>
+            </a:pPr>
           </a:p>
         </p:txBody>
       </p:sp>
@@ -3911,10 +3936,12 @@
               </a:defRPr>
             </a:pPr>
             <a:r>
+              <a:rPr/>
               <a:t>**「あなたが関わった利用者さん（患者さん）で、</a:t>
             </a:r>
             <a:br/>
             <a:r>
+              <a:rPr/>
               <a:t>もっとこうできたらよかったな、と思ったことは？」**</a:t>
             </a:r>
           </a:p>
@@ -3952,6 +3979,7 @@
               <a:buChar char="●"/>
             </a:pPr>
             <a:r>
+              <a:rPr/>
               <a:t>正解はありません</a:t>
             </a:r>
           </a:p>
@@ -3966,6 +3994,7 @@
               <a:buChar char="●"/>
             </a:pPr>
             <a:r>
+              <a:rPr/>
               <a:t>批判しない、聞くことに集中</a:t>
             </a:r>
           </a:p>
@@ -3980,6 +4009,7 @@
               <a:buChar char="●"/>
             </a:pPr>
             <a:r>
+              <a:rPr/>
               <a:t>「自分だったらどうする？」を考えてみる</a:t>
             </a:r>
           </a:p>
@@ -3994,6 +4024,7 @@
               <a:buChar char="●"/>
             </a:pPr>
             <a:r>
+              <a:rPr/>
               <a:t>個人情報に配慮（名前は出さない）</a:t>
             </a:r>
           </a:p>
@@ -4008,7 +4039,7 @@
         <p:spPr>
           <a:xfrm>
             <a:off x="548640" y="2697480"/>
-            <a:ext cx="7772400" cy="320040"/>
+            <a:ext cx="7772400" cy="322579"/>
           </a:xfrm>
           <a:prstGeom prst="rect">
             <a:avLst/>
@@ -4030,6 +4061,7 @@
               </a:defRPr>
             </a:pPr>
             <a:r>
+              <a:rPr/>
               <a:t>1人1分ずつ話して、残り1分で「共通点」を見つけてください。</a:t>
             </a:r>
           </a:p>
@@ -4066,6 +4098,7 @@
               </a:defRPr>
             </a:pPr>
             <a:r>
+              <a:rPr/>
               <a:t>🎯 ガニェ第6事象: 練習の機会を与える</a:t>
             </a:r>
           </a:p>
@@ -4128,6 +4161,7 @@
               </a:defRPr>
             </a:pPr>
             <a:r>
+              <a:rPr/>
               <a:t>スライド11: グループワークの共有</a:t>
             </a:r>
           </a:p>
@@ -4172,7 +4206,9 @@
           <a:bodyPr rtlCol="0" anchor="ctr"/>
           <a:lstStyle/>
           <a:p>
-            <a:pPr algn="ctr"/>
+            <a:pPr algn="ctr">
+              <a:defRPr/>
+            </a:pPr>
           </a:p>
         </p:txBody>
       </p:sp>
@@ -4217,7 +4253,9 @@
           <a:bodyPr rtlCol="0" anchor="ctr"/>
           <a:lstStyle/>
           <a:p>
-            <a:pPr algn="ctr"/>
+            <a:pPr algn="ctr">
+              <a:defRPr/>
+            </a:pPr>
           </a:p>
         </p:txBody>
       </p:sp>
@@ -4252,23 +4290,28 @@
               </a:defRPr>
             </a:pPr>
             <a:r>
+              <a:rPr/>
               <a:t>ファシリテーターが2-3グループに発表を依頼</a:t>
             </a:r>
             <a:br/>
             <a:br/>
             <a:r>
+              <a:rPr/>
               <a:t>ポイント:</a:t>
             </a:r>
             <a:br/>
             <a:r>
+              <a:rPr/>
               <a:t>- 「気づいていた」のに「何もできなかった」経験が多い</a:t>
             </a:r>
             <a:br/>
             <a:r>
+              <a:rPr/>
               <a:t>- → それは「知識がなかった」のではなく「伝え方を知らなかった」だけ</a:t>
             </a:r>
             <a:br/>
             <a:r>
+              <a:rPr/>
               <a:t>- 今日からその「伝え方」を一つずつ学んでいきましょう</a:t>
             </a:r>
           </a:p>
@@ -4305,6 +4348,7 @@
               </a:defRPr>
             </a:pPr>
             <a:r>
+              <a:rPr/>
               <a:t>🎯 ガニェ第7事象: フィードバックを与える</a:t>
             </a:r>
           </a:p>
@@ -4367,6 +4411,7 @@
               </a:defRPr>
             </a:pPr>
             <a:r>
+              <a:rPr/>
               <a:t>スライド12: 困ったときの相談先</a:t>
             </a:r>
           </a:p>
@@ -4411,7 +4456,9 @@
           <a:bodyPr rtlCol="0" anchor="ctr"/>
           <a:lstStyle/>
           <a:p>
-            <a:pPr algn="ctr"/>
+            <a:pPr algn="ctr">
+              <a:defRPr/>
+            </a:pPr>
           </a:p>
         </p:txBody>
       </p:sp>
@@ -4456,7 +4503,9 @@
           <a:bodyPr rtlCol="0" anchor="ctr"/>
           <a:lstStyle/>
           <a:p>
-            <a:pPr algn="ctr"/>
+            <a:pPr algn="ctr">
+              <a:defRPr/>
+            </a:pPr>
           </a:p>
         </p:txBody>
       </p:sp>
@@ -4491,33 +4540,40 @@
               </a:defRPr>
             </a:pPr>
             <a:r>
+              <a:rPr/>
               <a:t>あなたが「何かおかしい」と感じたら：</a:t>
             </a:r>
             <a:br/>
             <a:br/>
             <a:r>
+              <a:rPr/>
               <a:t>Step 1: まず看護師に伝える</a:t>
             </a:r>
             <a:br/>
             <a:r>
+              <a:rPr/>
               <a:t>        「〇〇さん、いつもと違って△△な様子です」</a:t>
             </a:r>
             <a:br/>
             <a:br/>
             <a:r>
+              <a:rPr/>
               <a:t>Step 2: 看護師が判断して医師に報告</a:t>
             </a:r>
             <a:br/>
             <a:r>
+              <a:rPr/>
               <a:t>        → 必要に応じて緩和ケアチームに相談</a:t>
             </a:r>
             <a:br/>
             <a:br/>
             <a:r>
+              <a:rPr/>
               <a:t>Step 3: カンファレンスで情報共有</a:t>
             </a:r>
             <a:br/>
             <a:r>
+              <a:rPr/>
               <a:t>        あなたの「気づき」がチーム全体のケアを変える</a:t>
             </a:r>
           </a:p>
@@ -4554,6 +4610,7 @@
               </a:defRPr>
             </a:pPr>
             <a:r>
+              <a:rPr/>
               <a:t>**大切なのは「正確な医学的判断」ではなく、</a:t>
             </a:r>
           </a:p>
@@ -4567,7 +4624,7 @@
         </p:nvSpPr>
         <p:spPr>
           <a:xfrm>
-            <a:off x="548640" y="3660647"/>
+            <a:off x="548640" y="3678935"/>
             <a:ext cx="7772400" cy="320040"/>
           </a:xfrm>
           <a:prstGeom prst="rect">
@@ -4590,6 +4647,7 @@
               </a:defRPr>
             </a:pPr>
             <a:r>
+              <a:rPr/>
               <a:t>「いつもと違う」と感じたことを伝えること。**</a:t>
             </a:r>
           </a:p>
@@ -4778,6 +4836,7 @@
               </a:defRPr>
             </a:pPr>
             <a:r>
+              <a:rPr/>
               <a:t>スライド13: 多職種で支えるということ</a:t>
             </a:r>
           </a:p>
@@ -4822,7 +4881,9 @@
           <a:bodyPr rtlCol="0" anchor="ctr"/>
           <a:lstStyle/>
           <a:p>
-            <a:pPr algn="ctr"/>
+            <a:pPr algn="ctr">
+              <a:defRPr/>
+            </a:pPr>
           </a:p>
         </p:txBody>
       </p:sp>
@@ -4867,7 +4928,9 @@
           <a:bodyPr rtlCol="0" anchor="ctr"/>
           <a:lstStyle/>
           <a:p>
-            <a:pPr algn="ctr"/>
+            <a:pPr algn="ctr">
+              <a:defRPr/>
+            </a:pPr>
           </a:p>
         </p:txBody>
       </p:sp>
@@ -4902,63 +4965,78 @@
               </a:defRPr>
             </a:pPr>
             <a:r>
+              <a:rPr/>
               <a:t>利用者さん・ご家族</a:t>
             </a:r>
             <a:br/>
             <a:r>
+              <a:rPr/>
               <a:t>      ↑</a:t>
             </a:r>
             <a:br/>
             <a:r>
+              <a:rPr/>
               <a:t>  ┌───┼───┐</a:t>
             </a:r>
             <a:br/>
             <a:r>
+              <a:rPr/>
               <a:t>  │   │   │</a:t>
             </a:r>
             <a:br/>
             <a:r>
+              <a:rPr/>
               <a:t>介護  看護  医師</a:t>
             </a:r>
             <a:br/>
             <a:r>
+              <a:rPr/>
               <a:t>  │   │   │</a:t>
             </a:r>
             <a:br/>
             <a:r>
+              <a:rPr/>
               <a:t>  ├───┼───┤</a:t>
             </a:r>
             <a:br/>
             <a:r>
+              <a:rPr/>
               <a:t>  │   │   │</a:t>
             </a:r>
             <a:br/>
             <a:r>
+              <a:rPr/>
               <a:t>リハ  栄養  相談員</a:t>
             </a:r>
             <a:br/>
             <a:r>
+              <a:rPr/>
               <a:t>  │   │   │</a:t>
             </a:r>
             <a:br/>
             <a:r>
+              <a:rPr/>
               <a:t>  └───┼───┘</a:t>
             </a:r>
             <a:br/>
             <a:r>
+              <a:rPr/>
               <a:t>      │</a:t>
             </a:r>
             <a:br/>
             <a:r>
+              <a:rPr/>
               <a:t>  事務・その他</a:t>
             </a:r>
             <a:br/>
             <a:br/>
             <a:r>
+              <a:rPr/>
               <a:t>全員の「気づき」が集まって、</a:t>
             </a:r>
             <a:br/>
             <a:r>
+              <a:rPr/>
               <a:t>はじめて「その人らしいケア」が実現する</a:t>
             </a:r>
           </a:p>
@@ -4995,6 +5073,7 @@
               </a:defRPr>
             </a:pPr>
             <a:r>
+              <a:rPr/>
               <a:t>**介護職の「気づき」は、医師や看護師には見えないものを含んでいます。</a:t>
             </a:r>
           </a:p>
@@ -5057,6 +5136,7 @@
               </a:defRPr>
             </a:pPr>
             <a:r>
+              <a:rPr/>
               <a:t>スライド14: まとめ</a:t>
             </a:r>
           </a:p>
@@ -5101,7 +5181,9 @@
           <a:bodyPr rtlCol="0" anchor="ctr"/>
           <a:lstStyle/>
           <a:p>
-            <a:pPr algn="ctr"/>
+            <a:pPr algn="ctr">
+              <a:defRPr/>
+            </a:pPr>
           </a:p>
         </p:txBody>
       </p:sp>
@@ -5146,7 +5228,9 @@
           <a:bodyPr rtlCol="0" anchor="ctr"/>
           <a:lstStyle/>
           <a:p>
-            <a:pPr algn="ctr"/>
+            <a:pPr algn="ctr">
+              <a:defRPr/>
+            </a:pPr>
           </a:p>
         </p:txBody>
       </p:sp>
@@ -5181,28 +5265,34 @@
               </a:defRPr>
             </a:pPr>
             <a:r>
+              <a:rPr/>
               <a:t>1. 緩和ケアは「終末期だけ」「がんだけ」のものではない</a:t>
             </a:r>
             <a:br/>
             <a:r>
+              <a:rPr/>
               <a:t>   → つらさを和らげること、すべてが緩和ケア</a:t>
             </a:r>
             <a:br/>
             <a:br/>
             <a:r>
+              <a:rPr/>
               <a:t>2. あなたの「いつもと違う」という気づきが出発点</a:t>
             </a:r>
             <a:br/>
             <a:r>
+              <a:rPr/>
               <a:t>   → 専門知識がなくても大丈夫。感じたことを伝えよう</a:t>
             </a:r>
             <a:br/>
             <a:br/>
             <a:r>
+              <a:rPr/>
               <a:t>3. 一人で抱えない。看護師に伝えることから始めよう</a:t>
             </a:r>
             <a:br/>
             <a:r>
+              <a:rPr/>
               <a:t>   → あなたの一言がチームのケアを変える</a:t>
             </a:r>
           </a:p>
@@ -5265,6 +5355,7 @@
               </a:defRPr>
             </a:pPr>
             <a:r>
+              <a:rPr/>
               <a:t>スライド15: 小さな一歩から</a:t>
             </a:r>
           </a:p>
@@ -5279,7 +5370,7 @@
         <p:spPr>
           <a:xfrm>
             <a:off x="548640" y="822960"/>
-            <a:ext cx="7772400" cy="320040"/>
+            <a:ext cx="7772400" cy="322579"/>
           </a:xfrm>
           <a:prstGeom prst="rect">
             <a:avLst/>
@@ -5301,6 +5392,7 @@
               </a:defRPr>
             </a:pPr>
             <a:r>
+              <a:rPr/>
               <a:t>今日のワーク:</a:t>
             </a:r>
           </a:p>
@@ -5345,7 +5437,9 @@
           <a:bodyPr rtlCol="0" anchor="ctr"/>
           <a:lstStyle/>
           <a:p>
-            <a:pPr algn="ctr"/>
+            <a:pPr algn="ctr">
+              <a:defRPr/>
+            </a:pPr>
           </a:p>
         </p:txBody>
       </p:sp>
@@ -5390,7 +5484,9 @@
           <a:bodyPr rtlCol="0" anchor="ctr"/>
           <a:lstStyle/>
           <a:p>
-            <a:pPr algn="ctr"/>
+            <a:pPr algn="ctr">
+              <a:defRPr/>
+            </a:pPr>
           </a:p>
         </p:txBody>
       </p:sp>
@@ -5425,22 +5521,27 @@
               </a:defRPr>
             </a:pPr>
             <a:r>
+              <a:rPr/>
               <a:t>明日から、利用者さんに一つだけ</a:t>
             </a:r>
             <a:br/>
             <a:r>
+              <a:rPr/>
               <a:t>いつもの声かけに「＋ひと言」を加えてみてください。</a:t>
             </a:r>
             <a:br/>
             <a:r>
+              <a:rPr/>
               <a:t>例: 「痛いところはありませんか？」</a:t>
             </a:r>
             <a:br/>
             <a:r>
+              <a:rPr/>
               <a:t>例: 「何か気になることはありますか？」</a:t>
             </a:r>
             <a:br/>
             <a:r>
+              <a:rPr/>
               <a:t>例: 「最近、眠れていますか？」</a:t>
             </a:r>
           </a:p>
@@ -5477,6 +5578,7 @@
               </a:defRPr>
             </a:pPr>
             <a:r>
+              <a:rPr/>
               <a:t>📝 ワークシート（配布）に書いてください：</a:t>
             </a:r>
           </a:p>
@@ -5514,6 +5616,7 @@
               <a:buChar char="●"/>
             </a:pPr>
             <a:r>
+              <a:rPr/>
               <a:t>「明日から試してみたい＋ひと言」を1つ</a:t>
             </a:r>
           </a:p>
@@ -5528,6 +5631,7 @@
               <a:buChar char="●"/>
             </a:pPr>
             <a:r>
+              <a:rPr/>
               <a:t>1週間後に「やってみてどうだったか」を共有する時間を設けます</a:t>
             </a:r>
           </a:p>
@@ -5564,6 +5668,7 @@
               </a:defRPr>
             </a:pPr>
             <a:r>
+              <a:rPr/>
               <a:t>🎯 ガニェ第8・9事象: 学習の成果を評価する / 保持と転移を促進する</a:t>
             </a:r>
           </a:p>
@@ -5626,6 +5731,7 @@
               </a:defRPr>
             </a:pPr>
             <a:r>
+              <a:rPr/>
               <a:t>スライド16: おわりに</a:t>
             </a:r>
           </a:p>
@@ -5670,7 +5776,9 @@
           <a:bodyPr rtlCol="0" anchor="ctr"/>
           <a:lstStyle/>
           <a:p>
-            <a:pPr algn="ctr"/>
+            <a:pPr algn="ctr">
+              <a:defRPr/>
+            </a:pPr>
           </a:p>
         </p:txBody>
       </p:sp>
@@ -5715,7 +5823,9 @@
           <a:bodyPr rtlCol="0" anchor="ctr"/>
           <a:lstStyle/>
           <a:p>
-            <a:pPr algn="ctr"/>
+            <a:pPr algn="ctr">
+              <a:defRPr/>
+            </a:pPr>
           </a:p>
         </p:txBody>
       </p:sp>
@@ -5750,14 +5860,17 @@
               </a:defRPr>
             </a:pPr>
             <a:r>
+              <a:rPr/>
               <a:t>目の前の人の「つらさ」に気づき、</a:t>
             </a:r>
             <a:br/>
             <a:r>
+              <a:rPr/>
               <a:t>寄り添い、伝える。</a:t>
             </a:r>
             <a:br/>
             <a:r>
+              <a:rPr/>
               <a:t>それは、皆さんが毎日していることの延長線上にあります。</a:t>
             </a:r>
           </a:p>
@@ -5772,7 +5885,7 @@
         <p:spPr>
           <a:xfrm>
             <a:off x="548640" y="1543507"/>
-            <a:ext cx="7772400" cy="320040"/>
+            <a:ext cx="7772400" cy="322579"/>
           </a:xfrm>
           <a:prstGeom prst="rect">
             <a:avLst/>
@@ -5794,6 +5907,7 @@
               </a:defRPr>
             </a:pPr>
             <a:r>
+              <a:rPr/>
               <a:t>ありがとうございました。</a:t>
             </a:r>
           </a:p>
@@ -5830,6 +5944,7 @@
               </a:defRPr>
             </a:pPr>
             <a:r>
+              <a:rPr/>
               <a:t>質問・感想があればいつでもお声がけください。</a:t>
             </a:r>
           </a:p>
@@ -5892,6 +6007,7 @@
               </a:defRPr>
             </a:pPr>
             <a:r>
+              <a:rPr/>
               <a:t>本スライドの出典: 日本緩和医療学会全国調査 Palliative Care Research (J-STAGE), WHO緩和ケアの定義(2002改訂)</a:t>
             </a:r>
           </a:p>
@@ -5928,6 +6044,7 @@
               </a:defRPr>
             </a:pPr>
             <a:r>
+              <a:rPr/>
               <a:t>作成: Learning Design Lab / AI Agent Team</a:t>
             </a:r>
           </a:p>
@@ -5990,6 +6107,7 @@
               </a:defRPr>
             </a:pPr>
             <a:r>
+              <a:rPr/>
               <a:t>スライド1: タイトル</a:t>
             </a:r>
           </a:p>
@@ -6034,7 +6152,9 @@
           <a:bodyPr rtlCol="0" anchor="ctr"/>
           <a:lstStyle/>
           <a:p>
-            <a:pPr algn="ctr"/>
+            <a:pPr algn="ctr">
+              <a:defRPr/>
+            </a:pPr>
           </a:p>
         </p:txBody>
       </p:sp>
@@ -6079,7 +6199,9 @@
           <a:bodyPr rtlCol="0" anchor="ctr"/>
           <a:lstStyle/>
           <a:p>
-            <a:pPr algn="ctr"/>
+            <a:pPr algn="ctr">
+              <a:defRPr/>
+            </a:pPr>
           </a:p>
         </p:txBody>
       </p:sp>
@@ -6114,10 +6236,12 @@
               </a:defRPr>
             </a:pPr>
             <a:r>
+              <a:rPr/>
               <a:t>所要時間: 20分</a:t>
             </a:r>
             <a:br/>
             <a:r>
+              <a:rPr/>
               <a:t>今日のルール: 正解を求めません。感じたことを大切にしてください。</a:t>
             </a:r>
           </a:p>
@@ -6180,6 +6304,7 @@
               </a:defRPr>
             </a:pPr>
             <a:r>
+              <a:rPr/>
               <a:t>スライド2: 問いかけ（注意の喚起）</a:t>
             </a:r>
           </a:p>
@@ -6224,7 +6349,9 @@
           <a:bodyPr rtlCol="0" anchor="ctr"/>
           <a:lstStyle/>
           <a:p>
-            <a:pPr algn="ctr"/>
+            <a:pPr algn="ctr">
+              <a:defRPr/>
+            </a:pPr>
           </a:p>
         </p:txBody>
       </p:sp>
@@ -6269,7 +6396,9 @@
           <a:bodyPr rtlCol="0" anchor="ctr"/>
           <a:lstStyle/>
           <a:p>
-            <a:pPr algn="ctr"/>
+            <a:pPr algn="ctr">
+              <a:defRPr/>
+            </a:pPr>
           </a:p>
         </p:txBody>
       </p:sp>
@@ -6304,10 +6433,12 @@
               </a:defRPr>
             </a:pPr>
             <a:r>
+              <a:rPr/>
               <a:t>「この方、最近つらそうだな」</a:t>
             </a:r>
             <a:br/>
             <a:r>
+              <a:rPr/>
               <a:t>「もう少し何かできることがあるんじゃないかな」</a:t>
             </a:r>
           </a:p>
@@ -6344,6 +6475,7 @@
               </a:defRPr>
             </a:pPr>
             <a:r>
+              <a:rPr/>
               <a:t>と感じたことはありませんか？</a:t>
             </a:r>
           </a:p>
@@ -6358,7 +6490,7 @@
         <p:spPr>
           <a:xfrm>
             <a:off x="548640" y="1737360"/>
-            <a:ext cx="7772400" cy="320040"/>
+            <a:ext cx="7772400" cy="322579"/>
           </a:xfrm>
           <a:prstGeom prst="rect">
             <a:avLst/>
@@ -6380,6 +6512,7 @@
               </a:defRPr>
             </a:pPr>
             <a:r>
+              <a:rPr/>
               <a:t>→ その「気づき」こそが、緩和ケアの出発点です。</a:t>
             </a:r>
           </a:p>
@@ -6416,6 +6549,7 @@
               </a:defRPr>
             </a:pPr>
             <a:r>
+              <a:rPr/>
               <a:t>🎯 ガニェ第1事象: 学習者の注意を喚起する</a:t>
             </a:r>
           </a:p>
@@ -6478,6 +6612,7 @@
               </a:defRPr>
             </a:pPr>
             <a:r>
+              <a:rPr/>
               <a:t>スライド3: 今日のゴール（学習目標の提示）</a:t>
             </a:r>
           </a:p>
@@ -6515,6 +6650,7 @@
               <a:buChar char="●"/>
             </a:pPr>
             <a:r>
+              <a:rPr/>
               <a:t>緩和ケアは「終末期だけのもの」ではないとわかる</a:t>
             </a:r>
           </a:p>
@@ -6529,6 +6665,7 @@
               <a:buChar char="●"/>
             </a:pPr>
             <a:r>
+              <a:rPr/>
               <a:t>あなたの職種でできる緩和ケアが1つ見つかる</a:t>
             </a:r>
           </a:p>
@@ -6543,6 +6680,7 @@
               <a:buChar char="●"/>
             </a:pPr>
             <a:r>
+              <a:rPr/>
               <a:t>困ったときに誰に相談すればいいかがわかる</a:t>
             </a:r>
           </a:p>
@@ -6587,7 +6725,9 @@
           <a:bodyPr rtlCol="0" anchor="ctr"/>
           <a:lstStyle/>
           <a:p>
-            <a:pPr algn="ctr"/>
+            <a:pPr algn="ctr">
+              <a:defRPr/>
+            </a:pPr>
           </a:p>
         </p:txBody>
       </p:sp>
@@ -6632,7 +6772,9 @@
           <a:bodyPr rtlCol="0" anchor="ctr"/>
           <a:lstStyle/>
           <a:p>
-            <a:pPr algn="ctr"/>
+            <a:pPr algn="ctr">
+              <a:defRPr/>
+            </a:pPr>
           </a:p>
         </p:txBody>
       </p:sp>
@@ -6667,10 +6809,12 @@
               </a:defRPr>
             </a:pPr>
             <a:r>
+              <a:rPr/>
               <a:t>「自分には関係ない」→「自分にもできることがある」</a:t>
             </a:r>
             <a:br/>
             <a:r>
+              <a:rPr/>
               <a:t>この変化が今日のゴールです。</a:t>
             </a:r>
           </a:p>
@@ -6707,6 +6851,7 @@
               </a:defRPr>
             </a:pPr>
             <a:r>
+              <a:rPr/>
               <a:t>🎯 ガニェ第2事象: 学習目標を知らせる</a:t>
             </a:r>
           </a:p>
@@ -6769,6 +6914,7 @@
               </a:defRPr>
             </a:pPr>
             <a:r>
+              <a:rPr/>
               <a:t>スライド4: まず、誤解を解きましょう（前提条件の想起）</a:t>
             </a:r>
           </a:p>
@@ -6805,6 +6951,7 @@
               </a:defRPr>
             </a:pPr>
             <a:r>
+              <a:rPr/>
               <a:t>よくある誤解：</a:t>
             </a:r>
           </a:p>
@@ -7167,6 +7314,7 @@
               </a:defRPr>
             </a:pPr>
             <a:r>
+              <a:rPr/>
               <a:t>🎯 ガニェ第3事象: 前提条件を思い出させる</a:t>
             </a:r>
           </a:p>
@@ -7229,6 +7377,7 @@
               </a:defRPr>
             </a:pPr>
             <a:r>
+              <a:rPr/>
               <a:t>スライド5: WHOの定義をやさしく</a:t>
             </a:r>
           </a:p>
@@ -7273,7 +7422,9 @@
           <a:bodyPr rtlCol="0" anchor="ctr"/>
           <a:lstStyle/>
           <a:p>
-            <a:pPr algn="ctr"/>
+            <a:pPr algn="ctr">
+              <a:defRPr/>
+            </a:pPr>
           </a:p>
         </p:txBody>
       </p:sp>
@@ -7318,7 +7469,9 @@
           <a:bodyPr rtlCol="0" anchor="ctr"/>
           <a:lstStyle/>
           <a:p>
-            <a:pPr algn="ctr"/>
+            <a:pPr algn="ctr">
+              <a:defRPr/>
+            </a:pPr>
           </a:p>
         </p:txBody>
       </p:sp>
@@ -7353,14 +7506,17 @@
               </a:defRPr>
             </a:pPr>
             <a:r>
+              <a:rPr/>
               <a:t>重い病気に向き合う患者さんとご家族の</a:t>
             </a:r>
             <a:br/>
             <a:r>
+              <a:rPr/>
               <a:t>「つらさ」を和らげて</a:t>
             </a:r>
             <a:br/>
             <a:r>
+              <a:rPr/>
               <a:t>その人らしい生活を支えること</a:t>
             </a:r>
           </a:p>
@@ -7397,6 +7553,7 @@
               </a:defRPr>
             </a:pPr>
             <a:r>
+              <a:rPr/>
               <a:t>「つらさ」には4つの種類があります：</a:t>
             </a:r>
           </a:p>
@@ -7441,7 +7598,9 @@
           <a:bodyPr rtlCol="0" anchor="ctr"/>
           <a:lstStyle/>
           <a:p>
-            <a:pPr algn="ctr"/>
+            <a:pPr algn="ctr">
+              <a:defRPr/>
+            </a:pPr>
           </a:p>
         </p:txBody>
       </p:sp>
@@ -7486,7 +7645,9 @@
           <a:bodyPr rtlCol="0" anchor="ctr"/>
           <a:lstStyle/>
           <a:p>
-            <a:pPr algn="ctr"/>
+            <a:pPr algn="ctr">
+              <a:defRPr/>
+            </a:pPr>
           </a:p>
         </p:txBody>
       </p:sp>
@@ -7521,38 +7682,47 @@
               </a:defRPr>
             </a:pPr>
             <a:r>
+              <a:rPr/>
               <a:t>┌──────────────────────────┐</a:t>
             </a:r>
             <a:br/>
             <a:r>
+              <a:rPr/>
               <a:t>│     体のつらさ            │  痛み、息苦しさ、だるさ</a:t>
             </a:r>
             <a:br/>
             <a:r>
+              <a:rPr/>
               <a:t>├──────────────────────────┤</a:t>
             </a:r>
             <a:br/>
             <a:r>
+              <a:rPr/>
               <a:t>│     心のつらさ            │  不安、悲しみ、怒り</a:t>
             </a:r>
             <a:br/>
             <a:r>
+              <a:rPr/>
               <a:t>├──────────────────────────┤</a:t>
             </a:r>
             <a:br/>
             <a:r>
+              <a:rPr/>
               <a:t>│  人とのつながりのつらさ    │  孤独、家族との関係</a:t>
             </a:r>
             <a:br/>
             <a:r>
+              <a:rPr/>
               <a:t>├──────────────────────────┤</a:t>
             </a:r>
             <a:br/>
             <a:r>
+              <a:rPr/>
               <a:t>│  生きる意味のつらさ        │  「何のために生きているのか」</a:t>
             </a:r>
             <a:br/>
             <a:r>
+              <a:rPr/>
               <a:t>└──────────────────────────┘</a:t>
             </a:r>
           </a:p>
@@ -7567,7 +7737,7 @@
         <p:spPr>
           <a:xfrm>
             <a:off x="548640" y="4538776"/>
-            <a:ext cx="7772400" cy="320040"/>
+            <a:ext cx="7772400" cy="322579"/>
           </a:xfrm>
           <a:prstGeom prst="rect">
             <a:avLst/>
@@ -7589,6 +7759,7 @@
               </a:defRPr>
             </a:pPr>
             <a:r>
+              <a:rPr/>
               <a:t>体のつらさだけが緩和ケアではありません。</a:t>
             </a:r>
           </a:p>
@@ -7651,6 +7822,7 @@
               </a:defRPr>
             </a:pPr>
             <a:r>
+              <a:rPr/>
               <a:t>スライド6: 地域包括ケアの中の緩和ケア</a:t>
             </a:r>
           </a:p>
@@ -7695,7 +7867,9 @@
           <a:bodyPr rtlCol="0" anchor="ctr"/>
           <a:lstStyle/>
           <a:p>
-            <a:pPr algn="ctr"/>
+            <a:pPr algn="ctr">
+              <a:defRPr/>
+            </a:pPr>
           </a:p>
         </p:txBody>
       </p:sp>
@@ -7740,7 +7914,9 @@
           <a:bodyPr rtlCol="0" anchor="ctr"/>
           <a:lstStyle/>
           <a:p>
-            <a:pPr algn="ctr"/>
+            <a:pPr algn="ctr">
+              <a:defRPr/>
+            </a:pPr>
           </a:p>
         </p:txBody>
       </p:sp>
@@ -7775,30 +7951,37 @@
               </a:defRPr>
             </a:pPr>
             <a:r>
+              <a:rPr/>
               <a:t>        ┌─ 医療（病院・診療所・訪問診療）</a:t>
             </a:r>
             <a:br/>
             <a:r>
+              <a:rPr/>
               <a:t>        │</a:t>
             </a:r>
             <a:br/>
             <a:r>
+              <a:rPr/>
               <a:t>地域包括 ─┼─ 介護（施設・在宅サービス）  ← ここにいるのが皆さん</a:t>
             </a:r>
             <a:br/>
             <a:r>
+              <a:rPr/>
               <a:t>ケア    │</a:t>
             </a:r>
             <a:br/>
             <a:r>
+              <a:rPr/>
               <a:t>        ├─ 予防（健康づくり）</a:t>
             </a:r>
             <a:br/>
             <a:r>
+              <a:rPr/>
               <a:t>        │</a:t>
             </a:r>
             <a:br/>
             <a:r>
+              <a:rPr/>
               <a:t>        └─ 生活支援（住まい・見守り）</a:t>
             </a:r>
           </a:p>
@@ -7813,7 +7996,7 @@
         <p:spPr>
           <a:xfrm>
             <a:off x="548640" y="2626461"/>
-            <a:ext cx="7772400" cy="320040"/>
+            <a:ext cx="7772400" cy="322579"/>
           </a:xfrm>
           <a:prstGeom prst="rect">
             <a:avLst/>
@@ -7835,6 +8018,7 @@
               </a:defRPr>
             </a:pPr>
             <a:r>
+              <a:rPr/>
               <a:t>緩和ケアは、このすべてに横串を通すもの。</a:t>
             </a:r>
           </a:p>
@@ -7871,6 +8055,7 @@
               </a:defRPr>
             </a:pPr>
             <a:r>
+              <a:rPr/>
               <a:t>利用者さんの「つらさ」は、医療の場だけでなく、介護の場、生活の場で日々感じられている。</a:t>
             </a:r>
           </a:p>
@@ -7933,6 +8118,7 @@
               </a:defRPr>
             </a:pPr>
             <a:r>
+              <a:rPr/>
               <a:t>スライド7: 衝撃のデータ</a:t>
             </a:r>
           </a:p>
@@ -7969,6 +8155,7 @@
               </a:defRPr>
             </a:pPr>
             <a:r>
+              <a:rPr/>
               <a:t>日本緩和医療学会の全国調査（528施設）によると...</a:t>
             </a:r>
           </a:p>
@@ -8013,7 +8200,9 @@
           <a:bodyPr rtlCol="0" anchor="ctr"/>
           <a:lstStyle/>
           <a:p>
-            <a:pPr algn="ctr"/>
+            <a:pPr algn="ctr">
+              <a:defRPr/>
+            </a:pPr>
           </a:p>
         </p:txBody>
       </p:sp>
@@ -8058,7 +8247,9 @@
           <a:bodyPr rtlCol="0" anchor="ctr"/>
           <a:lstStyle/>
           <a:p>
-            <a:pPr algn="ctr"/>
+            <a:pPr algn="ctr">
+              <a:defRPr/>
+            </a:pPr>
           </a:p>
         </p:txBody>
       </p:sp>
@@ -8093,10 +8284,12 @@
               </a:defRPr>
             </a:pPr>
             <a:r>
+              <a:rPr/>
               <a:t>■■■■■■■■■■ 50%   医療従事者向けの緩和ケア教育を実施</a:t>
             </a:r>
             <a:br/>
             <a:r>
+              <a:rPr/>
               <a:t>■                10%   介護職向けの緩和ケア教育を実施</a:t>
             </a:r>
           </a:p>
@@ -8133,6 +8326,7 @@
               </a:defRPr>
             </a:pPr>
             <a:r>
+              <a:rPr/>
               <a:t>**介護職は、利用者さんと最も長い時間を過ごしているのに、</a:t>
             </a:r>
           </a:p>
@@ -8169,6 +8363,7 @@
               </a:defRPr>
             </a:pPr>
             <a:r>
+              <a:rPr/>
               <a:t>緩和ケアについて学ぶ機会が最も少ない。**</a:t>
             </a:r>
           </a:p>
@@ -8334,6 +8529,7 @@
               </a:defRPr>
             </a:pPr>
             <a:r>
+              <a:rPr/>
               <a:t>→ 一番近くにいるあなたの「気づき」が、一番大切。</a:t>
             </a:r>
           </a:p>
@@ -8370,6 +8566,7 @@
               </a:defRPr>
             </a:pPr>
             <a:r>
+              <a:rPr/>
               <a:t>🎯 ガニェ第4事象: 新しい内容を提示する（データで実感を促す）</a:t>
             </a:r>
           </a:p>
@@ -8432,6 +8629,7 @@
               </a:defRPr>
             </a:pPr>
             <a:r>
+              <a:rPr/>
               <a:t>スライド8: あなたの職種でできること</a:t>
             </a:r>
           </a:p>
@@ -8872,7 +9070,7 @@
         <p:spPr>
           <a:xfrm>
             <a:off x="548640" y="3154679"/>
-            <a:ext cx="7772400" cy="320040"/>
+            <a:ext cx="7772400" cy="322579"/>
           </a:xfrm>
           <a:prstGeom prst="rect">
             <a:avLst/>
@@ -8894,6 +9092,7 @@
               </a:defRPr>
             </a:pPr>
             <a:r>
+              <a:rPr/>
               <a:t>「自分の仕事の延長線上」に緩和ケアはあります。</a:t>
             </a:r>
           </a:p>
@@ -8930,6 +9129,7 @@
               </a:defRPr>
             </a:pPr>
             <a:r>
+              <a:rPr/>
               <a:t>🎯 ガニェ第5事象: 学習の指針を与える</a:t>
             </a:r>
           </a:p>

--- a/output/education/2026-03-26_palliative-care-community/palliative-care-community_slides_allstaff.pptx
+++ b/output/education/2026-03-26_palliative-care-community/palliative-care-community_slides_allstaff.pptx
@@ -3133,6 +3133,7 @@
               </a:defRPr>
             </a:pPr>
             <a:r>
+              <a:rPr/>
               <a:t>地域で支える緩和ケア</a:t>
             </a:r>
           </a:p>
@@ -3169,6 +3170,7 @@
               </a:defRPr>
             </a:pPr>
             <a:r>
+              <a:rPr/>
               <a:t>— 私たちにできること</a:t>
             </a:r>
           </a:p>
@@ -3213,7 +3215,9 @@
           <a:bodyPr rtlCol="0" anchor="ctr"/>
           <a:lstStyle/>
           <a:p>
-            <a:pPr algn="ctr"/>
+            <a:pPr algn="ctr">
+              <a:defRPr/>
+            </a:pPr>
           </a:p>
         </p:txBody>
       </p:sp>
@@ -3226,7 +3230,7 @@
         <p:spPr>
           <a:xfrm>
             <a:off x="457200" y="2560320"/>
-            <a:ext cx="8229600" cy="274320"/>
+            <a:ext cx="8229600" cy="304799"/>
           </a:xfrm>
           <a:prstGeom prst="rect">
             <a:avLst/>
@@ -3248,6 +3252,7 @@
               </a:defRPr>
             </a:pPr>
             <a:r>
+              <a:rPr/>
               <a:t>20分 | 全スタッフ向け</a:t>
             </a:r>
           </a:p>
@@ -3292,7 +3297,9 @@
           <a:bodyPr rtlCol="0" anchor="ctr"/>
           <a:lstStyle/>
           <a:p>
-            <a:pPr algn="ctr"/>
+            <a:pPr algn="ctr">
+              <a:defRPr/>
+            </a:pPr>
           </a:p>
         </p:txBody>
       </p:sp>
@@ -3337,7 +3344,9 @@
           <a:bodyPr rtlCol="0" anchor="ctr"/>
           <a:lstStyle/>
           <a:p>
-            <a:pPr algn="ctr"/>
+            <a:pPr algn="ctr">
+              <a:defRPr/>
+            </a:pPr>
           </a:p>
         </p:txBody>
       </p:sp>
@@ -3372,10 +3381,12 @@
               </a:defRPr>
             </a:pPr>
             <a:r>
+              <a:rPr/>
               <a:t>「この方、最近つらそうだな」</a:t>
             </a:r>
             <a:br/>
             <a:r>
+              <a:rPr/>
               <a:t>その「気づき」こそが、緩和ケアの出発点です。</a:t>
             </a:r>
           </a:p>
@@ -3438,6 +3449,7 @@
               </a:defRPr>
             </a:pPr>
             <a:r>
+              <a:rPr/>
               <a:t>「緩和ケア」と聞いて何を思い浮かべますか？</a:t>
             </a:r>
           </a:p>
@@ -3482,7 +3494,9 @@
           <a:bodyPr rtlCol="0" anchor="ctr"/>
           <a:lstStyle/>
           <a:p>
-            <a:pPr algn="ctr"/>
+            <a:pPr algn="ctr">
+              <a:defRPr/>
+            </a:pPr>
           </a:p>
         </p:txBody>
       </p:sp>
@@ -3527,7 +3541,9 @@
           <a:bodyPr rtlCol="0" anchor="ctr"/>
           <a:lstStyle/>
           <a:p>
-            <a:pPr algn="ctr"/>
+            <a:pPr algn="ctr">
+              <a:defRPr/>
+            </a:pPr>
           </a:p>
         </p:txBody>
       </p:sp>
@@ -3562,6 +3578,7 @@
               </a:defRPr>
             </a:pPr>
             <a:r>
+              <a:rPr/>
               <a:t>✕ 終末期の人だけが受けるもの</a:t>
             </a:r>
           </a:p>
@@ -3606,7 +3623,9 @@
           <a:bodyPr rtlCol="0" anchor="ctr"/>
           <a:lstStyle/>
           <a:p>
-            <a:pPr algn="ctr"/>
+            <a:pPr algn="ctr">
+              <a:defRPr/>
+            </a:pPr>
           </a:p>
         </p:txBody>
       </p:sp>
@@ -3641,6 +3660,7 @@
               </a:defRPr>
             </a:pPr>
             <a:r>
+              <a:rPr/>
               <a:t>○ 診断されたときから始められる</a:t>
             </a:r>
           </a:p>
@@ -3687,7 +3707,9 @@
           <a:bodyPr rtlCol="0" anchor="ctr"/>
           <a:lstStyle/>
           <a:p>
-            <a:pPr algn="ctr"/>
+            <a:pPr algn="ctr">
+              <a:defRPr/>
+            </a:pPr>
           </a:p>
         </p:txBody>
       </p:sp>
@@ -3722,6 +3744,7 @@
               </a:defRPr>
             </a:pPr>
             <a:r>
+              <a:rPr/>
               <a:t>✕ がんの人だけが対象</a:t>
             </a:r>
           </a:p>
@@ -3766,7 +3789,9 @@
           <a:bodyPr rtlCol="0" anchor="ctr"/>
           <a:lstStyle/>
           <a:p>
-            <a:pPr algn="ctr"/>
+            <a:pPr algn="ctr">
+              <a:defRPr/>
+            </a:pPr>
           </a:p>
         </p:txBody>
       </p:sp>
@@ -3801,6 +3826,7 @@
               </a:defRPr>
             </a:pPr>
             <a:r>
+              <a:rPr/>
               <a:t>○ 心不全、認知症、呼吸器疾患なども対象</a:t>
             </a:r>
           </a:p>
@@ -3847,7 +3873,9 @@
           <a:bodyPr rtlCol="0" anchor="ctr"/>
           <a:lstStyle/>
           <a:p>
-            <a:pPr algn="ctr"/>
+            <a:pPr algn="ctr">
+              <a:defRPr/>
+            </a:pPr>
           </a:p>
         </p:txBody>
       </p:sp>
@@ -3882,6 +3910,7 @@
               </a:defRPr>
             </a:pPr>
             <a:r>
+              <a:rPr/>
               <a:t>✕ 特別な専門家だけがやること</a:t>
             </a:r>
           </a:p>
@@ -3926,7 +3955,9 @@
           <a:bodyPr rtlCol="0" anchor="ctr"/>
           <a:lstStyle/>
           <a:p>
-            <a:pPr algn="ctr"/>
+            <a:pPr algn="ctr">
+              <a:defRPr/>
+            </a:pPr>
           </a:p>
         </p:txBody>
       </p:sp>
@@ -3961,6 +3992,7 @@
               </a:defRPr>
             </a:pPr>
             <a:r>
+              <a:rPr/>
               <a:t>○ すべての職種が関われる</a:t>
             </a:r>
           </a:p>
@@ -4007,7 +4039,9 @@
           <a:bodyPr rtlCol="0" anchor="ctr"/>
           <a:lstStyle/>
           <a:p>
-            <a:pPr algn="ctr"/>
+            <a:pPr algn="ctr">
+              <a:defRPr/>
+            </a:pPr>
           </a:p>
         </p:txBody>
       </p:sp>
@@ -4042,6 +4076,7 @@
               </a:defRPr>
             </a:pPr>
             <a:r>
+              <a:rPr/>
               <a:t>✕ 「もう何もできない」</a:t>
             </a:r>
           </a:p>
@@ -4086,7 +4121,9 @@
           <a:bodyPr rtlCol="0" anchor="ctr"/>
           <a:lstStyle/>
           <a:p>
-            <a:pPr algn="ctr"/>
+            <a:pPr algn="ctr">
+              <a:defRPr/>
+            </a:pPr>
           </a:p>
         </p:txBody>
       </p:sp>
@@ -4121,6 +4158,7 @@
               </a:defRPr>
             </a:pPr>
             <a:r>
+              <a:rPr/>
               <a:t>○ 「できることはまだたくさんある」</a:t>
             </a:r>
           </a:p>
@@ -4161,7 +4199,7 @@
         <p:spPr>
           <a:xfrm>
             <a:off x="457200" y="274320"/>
-            <a:ext cx="8229600" cy="457200"/>
+            <a:ext cx="8229600" cy="482600"/>
           </a:xfrm>
           <a:prstGeom prst="rect">
             <a:avLst/>
@@ -4183,6 +4221,7 @@
               </a:defRPr>
             </a:pPr>
             <a:r>
+              <a:rPr/>
               <a:t>「つらさ」には4つの種類がある</a:t>
             </a:r>
           </a:p>
@@ -4227,7 +4266,9 @@
           <a:bodyPr rtlCol="0" anchor="ctr"/>
           <a:lstStyle/>
           <a:p>
-            <a:pPr algn="ctr"/>
+            <a:pPr algn="ctr">
+              <a:defRPr/>
+            </a:pPr>
           </a:p>
         </p:txBody>
       </p:sp>
@@ -4272,7 +4313,9 @@
           <a:bodyPr rtlCol="0" anchor="ctr"/>
           <a:lstStyle/>
           <a:p>
-            <a:pPr algn="ctr"/>
+            <a:pPr algn="ctr">
+              <a:defRPr/>
+            </a:pPr>
           </a:p>
         </p:txBody>
       </p:sp>
@@ -4307,6 +4350,7 @@
               </a:defRPr>
             </a:pPr>
             <a:r>
+              <a:rPr/>
               <a:t>身体的</a:t>
             </a:r>
           </a:p>
@@ -4320,7 +4364,7 @@
         </p:nvSpPr>
         <p:spPr>
           <a:xfrm>
-            <a:off x="502920" y="1645919"/>
+            <a:off x="502920" y="1664208"/>
             <a:ext cx="3840480" cy="640080"/>
           </a:xfrm>
           <a:prstGeom prst="rect">
@@ -4343,6 +4387,7 @@
               </a:defRPr>
             </a:pPr>
             <a:r>
+              <a:rPr/>
               <a:t>痛み、息苦しさ、だるさ、食欲不振</a:t>
             </a:r>
           </a:p>
@@ -4389,7 +4434,9 @@
           <a:bodyPr rtlCol="0" anchor="ctr"/>
           <a:lstStyle/>
           <a:p>
-            <a:pPr algn="ctr"/>
+            <a:pPr algn="ctr">
+              <a:defRPr/>
+            </a:pPr>
           </a:p>
         </p:txBody>
       </p:sp>
@@ -4424,6 +4471,7 @@
               </a:defRPr>
             </a:pPr>
             <a:r>
+              <a:rPr/>
               <a:t>精神的</a:t>
             </a:r>
           </a:p>
@@ -4437,7 +4485,7 @@
         </p:nvSpPr>
         <p:spPr>
           <a:xfrm>
-            <a:off x="4983480" y="1645919"/>
+            <a:off x="4983480" y="1664208"/>
             <a:ext cx="3840480" cy="640080"/>
           </a:xfrm>
           <a:prstGeom prst="rect">
@@ -4460,6 +4508,7 @@
               </a:defRPr>
             </a:pPr>
             <a:r>
+              <a:rPr/>
               <a:t>不安、うつ、恐れ、怒り</a:t>
             </a:r>
           </a:p>
@@ -4506,7 +4555,9 @@
           <a:bodyPr rtlCol="0" anchor="ctr"/>
           <a:lstStyle/>
           <a:p>
-            <a:pPr algn="ctr"/>
+            <a:pPr algn="ctr">
+              <a:defRPr/>
+            </a:pPr>
           </a:p>
         </p:txBody>
       </p:sp>
@@ -4541,6 +4592,7 @@
               </a:defRPr>
             </a:pPr>
             <a:r>
+              <a:rPr/>
               <a:t>社会的</a:t>
             </a:r>
           </a:p>
@@ -4577,6 +4629,7 @@
               </a:defRPr>
             </a:pPr>
             <a:r>
+              <a:rPr/>
               <a:t>仕事・お金の心配、家族への負担</a:t>
             </a:r>
           </a:p>
@@ -4623,7 +4676,9 @@
           <a:bodyPr rtlCol="0" anchor="ctr"/>
           <a:lstStyle/>
           <a:p>
-            <a:pPr algn="ctr"/>
+            <a:pPr algn="ctr">
+              <a:defRPr/>
+            </a:pPr>
           </a:p>
         </p:txBody>
       </p:sp>
@@ -4658,6 +4713,7 @@
               </a:defRPr>
             </a:pPr>
             <a:r>
+              <a:rPr/>
               <a:t>スピリチュアル</a:t>
             </a:r>
           </a:p>
@@ -4694,6 +4750,7 @@
               </a:defRPr>
             </a:pPr>
             <a:r>
+              <a:rPr/>
               <a:t>「自分の人生に意味はあったのか」</a:t>
             </a:r>
           </a:p>
@@ -4738,7 +4795,9 @@
           <a:bodyPr rtlCol="0" anchor="ctr"/>
           <a:lstStyle/>
           <a:p>
-            <a:pPr algn="ctr"/>
+            <a:pPr algn="ctr">
+              <a:defRPr/>
+            </a:pPr>
           </a:p>
         </p:txBody>
       </p:sp>
@@ -4783,7 +4842,9 @@
           <a:bodyPr rtlCol="0" anchor="ctr"/>
           <a:lstStyle/>
           <a:p>
-            <a:pPr algn="ctr"/>
+            <a:pPr algn="ctr">
+              <a:defRPr/>
+            </a:pPr>
           </a:p>
         </p:txBody>
       </p:sp>
@@ -4796,7 +4857,7 @@
         <p:spPr>
           <a:xfrm>
             <a:off x="685800" y="4645152"/>
-            <a:ext cx="7863840" cy="219456"/>
+            <a:ext cx="7863840" cy="304799"/>
           </a:xfrm>
           <a:prstGeom prst="rect">
             <a:avLst/>
@@ -4818,6 +4879,7 @@
               </a:defRPr>
             </a:pPr>
             <a:r>
+              <a:rPr/>
               <a:t>すべての職種が、どれかの「つらさ」に関われる。</a:t>
             </a:r>
           </a:p>
@@ -4858,7 +4920,7 @@
         <p:spPr>
           <a:xfrm>
             <a:off x="457200" y="274320"/>
-            <a:ext cx="8229600" cy="457200"/>
+            <a:ext cx="8229600" cy="482600"/>
           </a:xfrm>
           <a:prstGeom prst="rect">
             <a:avLst/>
@@ -4880,6 +4942,7 @@
               </a:defRPr>
             </a:pPr>
             <a:r>
+              <a:rPr/>
               <a:t>数字で見る「実装のギャップ」</a:t>
             </a:r>
           </a:p>
@@ -4924,7 +4987,9 @@
           <a:bodyPr rtlCol="0" anchor="ctr"/>
           <a:lstStyle/>
           <a:p>
-            <a:pPr algn="ctr"/>
+            <a:pPr algn="ctr">
+              <a:defRPr/>
+            </a:pPr>
           </a:p>
         </p:txBody>
       </p:sp>
@@ -4967,7 +5032,9 @@
           <a:bodyPr rtlCol="0" anchor="ctr"/>
           <a:lstStyle/>
           <a:p>
-            <a:pPr algn="ctr"/>
+            <a:pPr algn="ctr">
+              <a:defRPr/>
+            </a:pPr>
           </a:p>
         </p:txBody>
       </p:sp>
@@ -4980,7 +5047,7 @@
         <p:spPr>
           <a:xfrm>
             <a:off x="457200" y="1234440"/>
-            <a:ext cx="2286000" cy="548640"/>
+            <a:ext cx="2286000" cy="589279"/>
           </a:xfrm>
           <a:prstGeom prst="rect">
             <a:avLst/>
@@ -5002,6 +5069,7 @@
               </a:defRPr>
             </a:pPr>
             <a:r>
+              <a:rPr/>
               <a:t>64.8%</a:t>
             </a:r>
           </a:p>
@@ -5038,6 +5106,7 @@
               </a:defRPr>
             </a:pPr>
             <a:r>
+              <a:rPr/>
               <a:t>の施設に緩和ケア相談体制あり</a:t>
             </a:r>
           </a:p>
@@ -5074,6 +5143,7 @@
               </a:defRPr>
             </a:pPr>
             <a:r>
+              <a:rPr/>
               <a:t>でも実際の利用は年数回程度</a:t>
             </a:r>
           </a:p>
@@ -5118,7 +5188,9 @@
           <a:bodyPr rtlCol="0" anchor="ctr"/>
           <a:lstStyle/>
           <a:p>
-            <a:pPr algn="ctr"/>
+            <a:pPr algn="ctr">
+              <a:defRPr/>
+            </a:pPr>
           </a:p>
         </p:txBody>
       </p:sp>
@@ -5131,7 +5203,7 @@
         <p:spPr>
           <a:xfrm>
             <a:off x="457200" y="2423160"/>
-            <a:ext cx="2286000" cy="548640"/>
+            <a:ext cx="2286000" cy="589279"/>
           </a:xfrm>
           <a:prstGeom prst="rect">
             <a:avLst/>
@@ -5153,6 +5225,7 @@
               </a:defRPr>
             </a:pPr>
             <a:r>
+              <a:rPr/>
               <a:t>~10%</a:t>
             </a:r>
           </a:p>
@@ -5189,6 +5262,7 @@
               </a:defRPr>
             </a:pPr>
             <a:r>
+              <a:rPr/>
               <a:t>の施設が介護職に緩和教育を実施</a:t>
             </a:r>
           </a:p>
@@ -5225,6 +5299,7 @@
               </a:defRPr>
             </a:pPr>
             <a:r>
+              <a:rPr/>
               <a:t>最も接する時間が長い職種なのに</a:t>
             </a:r>
           </a:p>
@@ -5269,7 +5344,9 @@
           <a:bodyPr rtlCol="0" anchor="ctr"/>
           <a:lstStyle/>
           <a:p>
-            <a:pPr algn="ctr"/>
+            <a:pPr algn="ctr">
+              <a:defRPr/>
+            </a:pPr>
           </a:p>
         </p:txBody>
       </p:sp>
@@ -5282,7 +5359,7 @@
         <p:spPr>
           <a:xfrm>
             <a:off x="457200" y="3611880"/>
-            <a:ext cx="2286000" cy="548640"/>
+            <a:ext cx="2286000" cy="589279"/>
           </a:xfrm>
           <a:prstGeom prst="rect">
             <a:avLst/>
@@ -5304,6 +5381,7 @@
               </a:defRPr>
             </a:pPr>
             <a:r>
+              <a:rPr/>
               <a:t>8-16h/日</a:t>
             </a:r>
           </a:p>
@@ -5340,6 +5418,7 @@
               </a:defRPr>
             </a:pPr>
             <a:r>
+              <a:rPr/>
               <a:t>介護職が利用者と過ごす時間</a:t>
             </a:r>
           </a:p>
@@ -5376,6 +5455,7 @@
               </a:defRPr>
             </a:pPr>
             <a:r>
+              <a:rPr/>
               <a:t>医師は数分〜数十分</a:t>
             </a:r>
           </a:p>
@@ -5416,7 +5496,7 @@
         <p:spPr>
           <a:xfrm>
             <a:off x="457200" y="274320"/>
-            <a:ext cx="8229600" cy="457200"/>
+            <a:ext cx="8229600" cy="482600"/>
           </a:xfrm>
           <a:prstGeom prst="rect">
             <a:avLst/>
@@ -5438,6 +5518,7 @@
               </a:defRPr>
             </a:pPr>
             <a:r>
+              <a:rPr/>
               <a:t>あなたの職種でできる緩和ケア</a:t>
             </a:r>
           </a:p>
@@ -5482,7 +5563,9 @@
           <a:bodyPr rtlCol="0" anchor="ctr"/>
           <a:lstStyle/>
           <a:p>
-            <a:pPr algn="ctr"/>
+            <a:pPr algn="ctr">
+              <a:defRPr/>
+            </a:pPr>
           </a:p>
         </p:txBody>
       </p:sp>
@@ -5527,7 +5610,9 @@
           <a:bodyPr rtlCol="0" anchor="ctr"/>
           <a:lstStyle/>
           <a:p>
-            <a:pPr algn="ctr"/>
+            <a:pPr algn="ctr">
+              <a:defRPr/>
+            </a:pPr>
           </a:p>
         </p:txBody>
       </p:sp>
@@ -5562,6 +5647,7 @@
               </a:defRPr>
             </a:pPr>
             <a:r>
+              <a:rPr/>
               <a:t>看護師</a:t>
             </a:r>
           </a:p>
@@ -5598,10 +5684,12 @@
               </a:defRPr>
             </a:pPr>
             <a:r>
+              <a:rPr/>
               <a:t>痛みや息苦しさの日常的な評価</a:t>
             </a:r>
             <a:br/>
             <a:r>
+              <a:rPr/>
               <a:t>「つらさの寒暖計」の活用</a:t>
             </a:r>
           </a:p>
@@ -5648,7 +5736,9 @@
           <a:bodyPr rtlCol="0" anchor="ctr"/>
           <a:lstStyle/>
           <a:p>
-            <a:pPr algn="ctr"/>
+            <a:pPr algn="ctr">
+              <a:defRPr/>
+            </a:pPr>
           </a:p>
         </p:txBody>
       </p:sp>
@@ -5683,6 +5773,7 @@
               </a:defRPr>
             </a:pPr>
             <a:r>
+              <a:rPr/>
               <a:t>介護士</a:t>
             </a:r>
           </a:p>
@@ -5719,10 +5810,12 @@
               </a:defRPr>
             </a:pPr>
             <a:r>
+              <a:rPr/>
               <a:t>入浴・食事中の痛み観察</a:t>
             </a:r>
             <a:br/>
             <a:r>
+              <a:rPr/>
               <a:t>「いつもと違う」に気づく力</a:t>
             </a:r>
           </a:p>
@@ -5769,7 +5862,9 @@
           <a:bodyPr rtlCol="0" anchor="ctr"/>
           <a:lstStyle/>
           <a:p>
-            <a:pPr algn="ctr"/>
+            <a:pPr algn="ctr">
+              <a:defRPr/>
+            </a:pPr>
           </a:p>
         </p:txBody>
       </p:sp>
@@ -5804,6 +5899,7 @@
               </a:defRPr>
             </a:pPr>
             <a:r>
+              <a:rPr/>
               <a:t>リハビリ</a:t>
             </a:r>
           </a:p>
@@ -5840,10 +5936,12 @@
               </a:defRPr>
             </a:pPr>
             <a:r>
+              <a:rPr/>
               <a:t>できることを増やすアプローチ</a:t>
             </a:r>
             <a:br/>
             <a:r>
+              <a:rPr/>
               <a:t>生活の質を支えるリハ</a:t>
             </a:r>
           </a:p>
@@ -5890,7 +5988,9 @@
           <a:bodyPr rtlCol="0" anchor="ctr"/>
           <a:lstStyle/>
           <a:p>
-            <a:pPr algn="ctr"/>
+            <a:pPr algn="ctr">
+              <a:defRPr/>
+            </a:pPr>
           </a:p>
         </p:txBody>
       </p:sp>
@@ -5925,6 +6025,7 @@
               </a:defRPr>
             </a:pPr>
             <a:r>
+              <a:rPr/>
               <a:t>事務・相談員</a:t>
             </a:r>
           </a:p>
@@ -5961,10 +6062,12 @@
               </a:defRPr>
             </a:pPr>
             <a:r>
+              <a:rPr/>
               <a:t>制度利用の橋渡し</a:t>
             </a:r>
             <a:br/>
             <a:r>
+              <a:rPr/>
               <a:t>家族の相談窓口</a:t>
             </a:r>
           </a:p>
@@ -6005,7 +6108,7 @@
         <p:spPr>
           <a:xfrm>
             <a:off x="457200" y="274320"/>
-            <a:ext cx="8229600" cy="457200"/>
+            <a:ext cx="8229600" cy="482600"/>
           </a:xfrm>
           <a:prstGeom prst="rect">
             <a:avLst/>
@@ -6027,6 +6130,7 @@
               </a:defRPr>
             </a:pPr>
             <a:r>
+              <a:rPr/>
               <a:t>グループワーク（5分）</a:t>
             </a:r>
           </a:p>
@@ -6071,7 +6175,9 @@
           <a:bodyPr rtlCol="0" anchor="ctr"/>
           <a:lstStyle/>
           <a:p>
-            <a:pPr algn="ctr"/>
+            <a:pPr algn="ctr">
+              <a:defRPr/>
+            </a:pPr>
           </a:p>
         </p:txBody>
       </p:sp>
@@ -6114,7 +6220,9 @@
           <a:bodyPr rtlCol="0" anchor="ctr"/>
           <a:lstStyle/>
           <a:p>
-            <a:pPr algn="ctr"/>
+            <a:pPr algn="ctr">
+              <a:defRPr/>
+            </a:pPr>
           </a:p>
         </p:txBody>
       </p:sp>
@@ -6159,7 +6267,9 @@
           <a:bodyPr rtlCol="0" anchor="ctr"/>
           <a:lstStyle/>
           <a:p>
-            <a:pPr algn="ctr"/>
+            <a:pPr algn="ctr">
+              <a:defRPr/>
+            </a:pPr>
           </a:p>
         </p:txBody>
       </p:sp>
@@ -6194,19 +6304,23 @@
               </a:defRPr>
             </a:pPr>
             <a:r>
+              <a:rPr/>
               <a:t>隣の人と話し合ってください:</a:t>
             </a:r>
             <a:br/>
             <a:br/>
             <a:r>
+              <a:rPr/>
               <a:t>「あなたが最近関わった方で、</a:t>
             </a:r>
             <a:br/>
             <a:r>
+              <a:rPr/>
               <a:t> 何かもう少しできたかもしれない、</a:t>
             </a:r>
             <a:br/>
             <a:r>
+              <a:rPr/>
               <a:t> と感じた場面はありますか？」</a:t>
             </a:r>
           </a:p>
@@ -6221,7 +6335,7 @@
         <p:spPr>
           <a:xfrm>
             <a:off x="1371600" y="3657600"/>
-            <a:ext cx="6400800" cy="274320"/>
+            <a:ext cx="6400800" cy="304799"/>
           </a:xfrm>
           <a:prstGeom prst="rect">
             <a:avLst/>
@@ -6243,6 +6357,7 @@
               </a:defRPr>
             </a:pPr>
             <a:r>
+              <a:rPr/>
               <a:t>正解を求めません。感じたことを大切にしてください。</a:t>
             </a:r>
           </a:p>
@@ -6305,6 +6420,7 @@
               </a:defRPr>
             </a:pPr>
             <a:r>
+              <a:rPr/>
               <a:t>今日持って帰ってほしいこと</a:t>
             </a:r>
           </a:p>
@@ -6349,7 +6465,9 @@
           <a:bodyPr rtlCol="0" anchor="ctr"/>
           <a:lstStyle/>
           <a:p>
-            <a:pPr algn="ctr"/>
+            <a:pPr algn="ctr">
+              <a:defRPr/>
+            </a:pPr>
           </a:p>
         </p:txBody>
       </p:sp>
@@ -6392,7 +6510,9 @@
           <a:bodyPr rtlCol="0" anchor="ctr"/>
           <a:lstStyle/>
           <a:p>
-            <a:pPr algn="ctr"/>
+            <a:pPr algn="ctr">
+              <a:defRPr/>
+            </a:pPr>
           </a:p>
         </p:txBody>
       </p:sp>
@@ -6427,6 +6547,7 @@
               </a:defRPr>
             </a:pPr>
             <a:r>
+              <a:rPr/>
               <a:t>1</a:t>
             </a:r>
           </a:p>
@@ -6441,7 +6562,7 @@
         <p:spPr>
           <a:xfrm>
             <a:off x="1828800" y="960120"/>
-            <a:ext cx="6858000" cy="365760"/>
+            <a:ext cx="6858000" cy="375920"/>
           </a:xfrm>
           <a:prstGeom prst="rect">
             <a:avLst/>
@@ -6463,6 +6584,7 @@
               </a:defRPr>
             </a:pPr>
             <a:r>
+              <a:rPr/>
               <a:t>緩和ケアは終末期だけじゃない</a:t>
             </a:r>
           </a:p>
@@ -6499,6 +6621,7 @@
               </a:defRPr>
             </a:pPr>
             <a:r>
+              <a:rPr/>
               <a:t>診断時から、どの疾患でも、どの職種でも</a:t>
             </a:r>
           </a:p>
@@ -6543,7 +6666,9 @@
           <a:bodyPr rtlCol="0" anchor="ctr"/>
           <a:lstStyle/>
           <a:p>
-            <a:pPr algn="ctr"/>
+            <a:pPr algn="ctr">
+              <a:defRPr/>
+            </a:pPr>
           </a:p>
         </p:txBody>
       </p:sp>
@@ -6578,6 +6703,7 @@
               </a:defRPr>
             </a:pPr>
             <a:r>
+              <a:rPr/>
               <a:t>2</a:t>
             </a:r>
           </a:p>
@@ -6592,7 +6718,7 @@
         <p:spPr>
           <a:xfrm>
             <a:off x="1828800" y="2148839"/>
-            <a:ext cx="6858000" cy="365760"/>
+            <a:ext cx="6858000" cy="375920"/>
           </a:xfrm>
           <a:prstGeom prst="rect">
             <a:avLst/>
@@ -6614,6 +6740,7 @@
               </a:defRPr>
             </a:pPr>
             <a:r>
+              <a:rPr/>
               <a:t>あなたの「気づき」が出発点</a:t>
             </a:r>
           </a:p>
@@ -6650,6 +6777,7 @@
               </a:defRPr>
             </a:pPr>
             <a:r>
+              <a:rPr/>
               <a:t>8-16時間一緒にいるあなただからこそ気づける</a:t>
             </a:r>
           </a:p>
@@ -6694,7 +6822,9 @@
           <a:bodyPr rtlCol="0" anchor="ctr"/>
           <a:lstStyle/>
           <a:p>
-            <a:pPr algn="ctr"/>
+            <a:pPr algn="ctr">
+              <a:defRPr/>
+            </a:pPr>
           </a:p>
         </p:txBody>
       </p:sp>
@@ -6729,6 +6859,7 @@
               </a:defRPr>
             </a:pPr>
             <a:r>
+              <a:rPr/>
               <a:t>3</a:t>
             </a:r>
           </a:p>
@@ -6743,7 +6874,7 @@
         <p:spPr>
           <a:xfrm>
             <a:off x="1828800" y="3337560"/>
-            <a:ext cx="6858000" cy="365760"/>
+            <a:ext cx="6858000" cy="375920"/>
           </a:xfrm>
           <a:prstGeom prst="rect">
             <a:avLst/>
@@ -6765,6 +6896,7 @@
               </a:defRPr>
             </a:pPr>
             <a:r>
+              <a:rPr/>
               <a:t>困ったら相談</a:t>
             </a:r>
           </a:p>
@@ -6801,6 +6933,7 @@
               </a:defRPr>
             </a:pPr>
             <a:r>
+              <a:rPr/>
               <a:t>緩和ケアチーム・地域連携室に声をかけてください</a:t>
             </a:r>
           </a:p>
@@ -6845,7 +6978,9 @@
           <a:bodyPr rtlCol="0" anchor="ctr"/>
           <a:lstStyle/>
           <a:p>
-            <a:pPr algn="ctr"/>
+            <a:pPr algn="ctr">
+              <a:defRPr/>
+            </a:pPr>
           </a:p>
         </p:txBody>
       </p:sp>
@@ -6890,7 +7025,9 @@
           <a:bodyPr rtlCol="0" anchor="ctr"/>
           <a:lstStyle/>
           <a:p>
-            <a:pPr algn="ctr"/>
+            <a:pPr algn="ctr">
+              <a:defRPr/>
+            </a:pPr>
           </a:p>
         </p:txBody>
       </p:sp>
@@ -6903,7 +7040,7 @@
         <p:spPr>
           <a:xfrm>
             <a:off x="1600200" y="4462272"/>
-            <a:ext cx="6035040" cy="310896"/>
+            <a:ext cx="6035040" cy="340360"/>
           </a:xfrm>
           <a:prstGeom prst="rect">
             <a:avLst/>
@@ -6925,6 +7062,7 @@
               </a:defRPr>
             </a:pPr>
             <a:r>
+              <a:rPr/>
               <a:t>「自分には関係ない」→「自分にもできることがある」</a:t>
             </a:r>
           </a:p>
